--- a/8.Kubernetes/1.Les techniques de déploiements avec Kubernetes.pptx
+++ b/8.Kubernetes/1.Les techniques de déploiements avec Kubernetes.pptx
@@ -248,7 +248,7 @@
           <a:p>
             <a:fld id="{658FBA48-6482-4940-A8BD-98D2278B94FD}" type="datetimeFigureOut">
               <a:rPr lang="fr-FR" smtClean="0"/>
-              <a:t>16/04/2025</a:t>
+              <a:t>04/04/2026</a:t>
             </a:fld>
             <a:endParaRPr lang="fr-FR"/>
           </a:p>
@@ -5337,19 +5337,7 @@
                 <a:ea typeface="+mn-ea"/>
                 <a:cs typeface="+mn-cs"/>
               </a:rPr>
-              <a:t>[].image</a:t>
-            </a:r>
-            <a:r>
-              <a:rPr lang="fr-FR" sz="1200" b="0" i="0" kern="1200" dirty="0" smtClean="0">
-                <a:solidFill>
-                  <a:schemeClr val="tx1"/>
-                </a:solidFill>
-                <a:effectLst/>
-                <a:latin typeface="+mn-lt"/>
-                <a:ea typeface="+mn-ea"/>
-                <a:cs typeface="+mn-cs"/>
-              </a:rPr>
-              <a:t>}« </a:t>
+              <a:t>[].image}« </a:t>
             </a:r>
           </a:p>
           <a:p>
@@ -6219,7 +6207,7 @@
             <a:fld id="{AA309A6D-C09C-4548-B29A-6CF363A7E532}" type="datetimeFigureOut">
               <a:rPr lang="fr-FR" smtClean="0"/>
               <a:pPr/>
-              <a:t>16/04/2025</a:t>
+              <a:t>04/04/2026</a:t>
             </a:fld>
             <a:endParaRPr lang="fr-BE"/>
           </a:p>
@@ -6426,7 +6414,7 @@
             <a:fld id="{AA309A6D-C09C-4548-B29A-6CF363A7E532}" type="datetimeFigureOut">
               <a:rPr lang="fr-FR" smtClean="0"/>
               <a:pPr/>
-              <a:t>16/04/2025</a:t>
+              <a:t>04/04/2026</a:t>
             </a:fld>
             <a:endParaRPr lang="fr-BE"/>
           </a:p>
@@ -6633,7 +6621,7 @@
             <a:fld id="{AA309A6D-C09C-4548-B29A-6CF363A7E532}" type="datetimeFigureOut">
               <a:rPr lang="fr-FR" smtClean="0"/>
               <a:pPr/>
-              <a:t>16/04/2025</a:t>
+              <a:t>04/04/2026</a:t>
             </a:fld>
             <a:endParaRPr lang="fr-BE"/>
           </a:p>
@@ -6840,7 +6828,7 @@
             <a:fld id="{AA309A6D-C09C-4548-B29A-6CF363A7E532}" type="datetimeFigureOut">
               <a:rPr lang="fr-FR" smtClean="0"/>
               <a:pPr/>
-              <a:t>16/04/2025</a:t>
+              <a:t>04/04/2026</a:t>
             </a:fld>
             <a:endParaRPr lang="fr-BE"/>
           </a:p>
@@ -7120,7 +7108,7 @@
             <a:fld id="{AA309A6D-C09C-4548-B29A-6CF363A7E532}" type="datetimeFigureOut">
               <a:rPr lang="fr-FR" smtClean="0"/>
               <a:pPr/>
-              <a:t>16/04/2025</a:t>
+              <a:t>04/04/2026</a:t>
             </a:fld>
             <a:endParaRPr lang="fr-BE"/>
           </a:p>
@@ -7443,7 +7431,7 @@
             <a:fld id="{AA309A6D-C09C-4548-B29A-6CF363A7E532}" type="datetimeFigureOut">
               <a:rPr lang="fr-FR" smtClean="0"/>
               <a:pPr/>
-              <a:t>16/04/2025</a:t>
+              <a:t>04/04/2026</a:t>
             </a:fld>
             <a:endParaRPr lang="fr-BE"/>
           </a:p>
@@ -7906,7 +7894,7 @@
             <a:fld id="{AA309A6D-C09C-4548-B29A-6CF363A7E532}" type="datetimeFigureOut">
               <a:rPr lang="fr-FR" smtClean="0"/>
               <a:pPr/>
-              <a:t>16/04/2025</a:t>
+              <a:t>04/04/2026</a:t>
             </a:fld>
             <a:endParaRPr lang="fr-BE"/>
           </a:p>
@@ -8053,7 +8041,7 @@
             <a:fld id="{AA309A6D-C09C-4548-B29A-6CF363A7E532}" type="datetimeFigureOut">
               <a:rPr lang="fr-FR" smtClean="0"/>
               <a:pPr/>
-              <a:t>16/04/2025</a:t>
+              <a:t>04/04/2026</a:t>
             </a:fld>
             <a:endParaRPr lang="fr-BE"/>
           </a:p>
@@ -8169,7 +8157,7 @@
             <a:fld id="{AA309A6D-C09C-4548-B29A-6CF363A7E532}" type="datetimeFigureOut">
               <a:rPr lang="fr-FR" smtClean="0"/>
               <a:pPr/>
-              <a:t>16/04/2025</a:t>
+              <a:t>04/04/2026</a:t>
             </a:fld>
             <a:endParaRPr lang="fr-BE"/>
           </a:p>
@@ -8476,7 +8464,7 @@
             <a:fld id="{AA309A6D-C09C-4548-B29A-6CF363A7E532}" type="datetimeFigureOut">
               <a:rPr lang="fr-FR" smtClean="0"/>
               <a:pPr/>
-              <a:t>16/04/2025</a:t>
+              <a:t>04/04/2026</a:t>
             </a:fld>
             <a:endParaRPr lang="fr-BE"/>
           </a:p>
@@ -8759,7 +8747,7 @@
             <a:fld id="{AA309A6D-C09C-4548-B29A-6CF363A7E532}" type="datetimeFigureOut">
               <a:rPr lang="fr-FR" smtClean="0"/>
               <a:pPr/>
-              <a:t>16/04/2025</a:t>
+              <a:t>04/04/2026</a:t>
             </a:fld>
             <a:endParaRPr lang="fr-BE"/>
           </a:p>
@@ -9505,13 +9493,7 @@
               <a:rPr lang="fr-FR" sz="1800" dirty="0" smtClean="0">
                 <a:latin typeface="Candara" panose="020E0502030303020204" pitchFamily="34" charset="0"/>
               </a:rPr>
-              <a:t>Il </a:t>
-            </a:r>
-            <a:r>
-              <a:rPr lang="fr-FR" sz="1800" dirty="0" smtClean="0">
-                <a:latin typeface="Candara" panose="020E0502030303020204" pitchFamily="34" charset="0"/>
-              </a:rPr>
-              <a:t>est nécessaire d'installer Docker avant </a:t>
+              <a:t>Il est nécessaire d'installer Docker avant </a:t>
             </a:r>
           </a:p>
           <a:p>
@@ -9528,17 +9510,8 @@
               <a:rPr lang="fr-FR" sz="1800" b="1" dirty="0" smtClean="0">
                 <a:latin typeface="Candara" panose="020E0502030303020204" pitchFamily="34" charset="0"/>
               </a:rPr>
-              <a:t>xécuter </a:t>
-            </a:r>
-            <a:r>
-              <a:rPr lang="fr-FR" sz="1800" b="1" dirty="0" smtClean="0">
-                <a:latin typeface="Candara" panose="020E0502030303020204" pitchFamily="34" charset="0"/>
-              </a:rPr>
-              <a:t>ces deux commandes: </a:t>
-            </a:r>
-            <a:endParaRPr lang="fr-FR" sz="1800" b="1" dirty="0" smtClean="0">
-              <a:latin typeface="Candara" panose="020E0502030303020204" pitchFamily="34" charset="0"/>
-            </a:endParaRPr>
+              <a:t>xécuter ces deux commandes: </a:t>
+            </a:r>
           </a:p>
           <a:p>
             <a:pPr marL="0" indent="0">
@@ -9776,13 +9749,7 @@
               <a:rPr lang="fr-FR" sz="1600" dirty="0" smtClean="0">
                 <a:latin typeface="Candara" panose="020E0502030303020204" pitchFamily="34" charset="0"/>
               </a:rPr>
-              <a:t> </a:t>
-            </a:r>
-            <a:r>
-              <a:rPr lang="fr-FR" sz="1600" dirty="0" smtClean="0">
-                <a:latin typeface="Candara" panose="020E0502030303020204" pitchFamily="34" charset="0"/>
-              </a:rPr>
-              <a:t>version</a:t>
+              <a:t> version</a:t>
             </a:r>
           </a:p>
           <a:p>
@@ -9801,13 +9768,7 @@
               <a:rPr lang="fr-FR" sz="1800" b="1" dirty="0" smtClean="0">
                 <a:latin typeface="Candara" panose="020E0502030303020204" pitchFamily="34" charset="0"/>
               </a:rPr>
-              <a:t>Il faut installer Kubectl en </a:t>
-            </a:r>
-            <a:r>
-              <a:rPr lang="fr-FR" sz="1800" b="1" dirty="0" smtClean="0">
-                <a:latin typeface="Candara" panose="020E0502030303020204" pitchFamily="34" charset="0"/>
-              </a:rPr>
-              <a:t>suite:</a:t>
+              <a:t>Il faut installer Kubectl en suite:</a:t>
             </a:r>
             <a:endParaRPr lang="fr-FR" sz="1800" b="1" dirty="0">
               <a:latin typeface="Candara" panose="020E0502030303020204" pitchFamily="34" charset="0"/>
@@ -10639,11 +10600,7 @@
           <a:p>
             <a:r>
               <a:rPr lang="fr-FR" sz="2400" b="1" i="1" dirty="0" smtClean="0"/>
-              <a:t>Initiation </a:t>
-            </a:r>
-            <a:r>
-              <a:rPr lang="fr-FR" sz="2400" b="1" i="1" dirty="0" smtClean="0"/>
-              <a:t>Minicube</a:t>
+              <a:t>Initiation Minicube</a:t>
             </a:r>
             <a:endParaRPr lang="en-US" sz="2400" b="1" dirty="0"/>
           </a:p>
@@ -10825,11 +10782,7 @@
           <a:p>
             <a:r>
               <a:rPr lang="fr-FR" sz="1200" dirty="0" smtClean="0"/>
-              <a:t>Un Pod est </a:t>
-            </a:r>
-            <a:r>
-              <a:rPr lang="fr-FR" sz="1200" dirty="0" smtClean="0"/>
-              <a:t>éphémère</a:t>
+              <a:t>Un Pod est éphémère</a:t>
             </a:r>
           </a:p>
           <a:p>
@@ -13917,25 +13870,7 @@
               <a:rPr lang="fr-FR" sz="1400" b="1" dirty="0" smtClean="0">
                 <a:latin typeface="+mj-lt"/>
               </a:rPr>
-              <a:t>Exemple </a:t>
-            </a:r>
-            <a:r>
-              <a:rPr lang="fr-FR" sz="1400" b="1" dirty="0" smtClean="0">
-                <a:latin typeface="+mj-lt"/>
-              </a:rPr>
-              <a:t>d’exposition avec un service</a:t>
-            </a:r>
-            <a:r>
-              <a:rPr lang="fr-FR" sz="1400" b="1" dirty="0" smtClean="0">
-                <a:latin typeface="+mj-lt"/>
-              </a:rPr>
-              <a:t> </a:t>
-            </a:r>
-            <a:r>
-              <a:rPr lang="fr-FR" sz="1400" b="1" dirty="0" smtClean="0">
-                <a:latin typeface="+mj-lt"/>
-              </a:rPr>
-              <a:t>Cluster IP:</a:t>
+              <a:t>Exemple d’exposition avec un service Cluster IP:</a:t>
             </a:r>
           </a:p>
         </p:txBody>
@@ -15788,13 +15723,7 @@
               <a:rPr lang="fr-FR" sz="1400" b="1" dirty="0" smtClean="0">
                 <a:latin typeface="+mj-lt"/>
               </a:rPr>
-              <a:t> </a:t>
-            </a:r>
-            <a:r>
-              <a:rPr lang="fr-FR" sz="1400" b="1" dirty="0" smtClean="0">
-                <a:latin typeface="+mj-lt"/>
-              </a:rPr>
-              <a:t>avec </a:t>
+              <a:t> avec </a:t>
             </a:r>
             <a:r>
               <a:rPr lang="fr-FR" sz="1400" b="1" dirty="0" err="1" smtClean="0">
@@ -16910,7 +16839,7 @@
                 </a:solidFill>
                 <a:latin typeface="Consolas" panose="020B0609020204030204" pitchFamily="49" charset="0"/>
               </a:rPr>
-              <a:t>ClusterIP</a:t>
+              <a:t>NodePort</a:t>
             </a:r>
             <a:r>
               <a:rPr lang="fr-FR" sz="1400" dirty="0" smtClean="0">
